--- a/theme2/idea.pptx
+++ b/theme2/idea.pptx
@@ -215,7 +215,7 @@
           <a:p>
             <a:fld id="{57D4F98B-F0E6-44C0-9AB4-90953A7276AC}" type="datetimeFigureOut">
               <a:rPr kumimoji="1" lang="ja-JP" altLang="en-US" smtClean="0"/>
-              <a:t>2026/2/26</a:t>
+              <a:t>2026/6/16</a:t>
             </a:fld>
             <a:endParaRPr kumimoji="1" lang="ja-JP" altLang="en-US"/>
           </a:p>
@@ -940,7 +940,7 @@
           <a:p>
             <a:fld id="{9F8F9044-9659-4826-B034-1BE7FDA79FDF}" type="datetime1">
               <a:rPr kumimoji="1" lang="ja-JP" altLang="en-US" smtClean="0"/>
-              <a:t>2026/2/26</a:t>
+              <a:t>2026/6/16</a:t>
             </a:fld>
             <a:endParaRPr kumimoji="1" lang="ja-JP" altLang="en-US"/>
           </a:p>
@@ -1170,7 +1170,7 @@
           <a:p>
             <a:fld id="{1C47EBFC-2D90-44DF-8386-F02394AEC7FE}" type="datetime1">
               <a:rPr kumimoji="1" lang="ja-JP" altLang="en-US" smtClean="0"/>
-              <a:t>2026/2/26</a:t>
+              <a:t>2026/6/16</a:t>
             </a:fld>
             <a:endParaRPr kumimoji="1" lang="ja-JP" altLang="en-US"/>
           </a:p>
@@ -1410,7 +1410,7 @@
           <a:p>
             <a:fld id="{831611F0-0817-49F6-98C7-791DF18890F6}" type="datetime1">
               <a:rPr kumimoji="1" lang="ja-JP" altLang="en-US" smtClean="0"/>
-              <a:t>2026/2/26</a:t>
+              <a:t>2026/6/16</a:t>
             </a:fld>
             <a:endParaRPr kumimoji="1" lang="ja-JP" altLang="en-US"/>
           </a:p>
@@ -1640,7 +1640,7 @@
           <a:p>
             <a:fld id="{4C28A8B7-1A4B-459D-81DC-B340C0A43BC8}" type="datetime1">
               <a:rPr kumimoji="1" lang="ja-JP" altLang="en-US" smtClean="0"/>
-              <a:t>2026/2/26</a:t>
+              <a:t>2026/6/16</a:t>
             </a:fld>
             <a:endParaRPr kumimoji="1" lang="ja-JP" altLang="en-US"/>
           </a:p>
@@ -1915,7 +1915,7 @@
           <a:p>
             <a:fld id="{6E4F5742-0FB6-412E-8FDF-35C32A8EA76D}" type="datetime1">
               <a:rPr kumimoji="1" lang="ja-JP" altLang="en-US" smtClean="0"/>
-              <a:t>2026/2/26</a:t>
+              <a:t>2026/6/16</a:t>
             </a:fld>
             <a:endParaRPr kumimoji="1" lang="ja-JP" altLang="en-US"/>
           </a:p>
@@ -2244,7 +2244,7 @@
           <a:p>
             <a:fld id="{DB891585-76FC-4DA8-A1C5-DBDF3760F534}" type="datetime1">
               <a:rPr kumimoji="1" lang="ja-JP" altLang="en-US" smtClean="0"/>
-              <a:t>2026/2/26</a:t>
+              <a:t>2026/6/16</a:t>
             </a:fld>
             <a:endParaRPr kumimoji="1" lang="ja-JP" altLang="en-US"/>
           </a:p>
@@ -2720,7 +2720,7 @@
           <a:p>
             <a:fld id="{A3DC4A2F-21F1-4004-B579-F0EB4FE467E6}" type="datetime1">
               <a:rPr kumimoji="1" lang="ja-JP" altLang="en-US" smtClean="0"/>
-              <a:t>2026/2/26</a:t>
+              <a:t>2026/6/16</a:t>
             </a:fld>
             <a:endParaRPr kumimoji="1" lang="ja-JP" altLang="en-US"/>
           </a:p>
@@ -2861,7 +2861,7 @@
           <a:p>
             <a:fld id="{66E00DF8-0E5D-425F-A31C-1B991362BB43}" type="datetime1">
               <a:rPr kumimoji="1" lang="ja-JP" altLang="en-US" smtClean="0"/>
-              <a:t>2026/2/26</a:t>
+              <a:t>2026/6/16</a:t>
             </a:fld>
             <a:endParaRPr kumimoji="1" lang="ja-JP" altLang="en-US"/>
           </a:p>
@@ -2974,7 +2974,7 @@
           <a:p>
             <a:fld id="{18FC71DF-821F-454D-A260-7BAB6E452792}" type="datetime1">
               <a:rPr kumimoji="1" lang="ja-JP" altLang="en-US" smtClean="0"/>
-              <a:t>2026/2/26</a:t>
+              <a:t>2026/6/16</a:t>
             </a:fld>
             <a:endParaRPr kumimoji="1" lang="ja-JP" altLang="en-US"/>
           </a:p>
@@ -3317,7 +3317,7 @@
           <a:p>
             <a:fld id="{63EA8E63-F7A0-48AB-97B9-A2B9DC0141F0}" type="datetime1">
               <a:rPr kumimoji="1" lang="ja-JP" altLang="en-US" smtClean="0"/>
-              <a:t>2026/2/26</a:t>
+              <a:t>2026/6/16</a:t>
             </a:fld>
             <a:endParaRPr kumimoji="1" lang="ja-JP" altLang="en-US"/>
           </a:p>
@@ -3605,7 +3605,7 @@
           <a:p>
             <a:fld id="{57343184-20C0-4E8F-951E-38A3B9CB9BC5}" type="datetime1">
               <a:rPr kumimoji="1" lang="ja-JP" altLang="en-US" smtClean="0"/>
-              <a:t>2026/2/26</a:t>
+              <a:t>2026/6/16</a:t>
             </a:fld>
             <a:endParaRPr kumimoji="1" lang="ja-JP" altLang="en-US"/>
           </a:p>
@@ -3878,7 +3878,7 @@
           <a:p>
             <a:fld id="{3C3F2ACF-24A3-468F-A630-8D11768CDA11}" type="datetime1">
               <a:rPr kumimoji="1" lang="ja-JP" altLang="en-US" smtClean="0"/>
-              <a:t>2026/2/26</a:t>
+              <a:t>2026/6/16</a:t>
             </a:fld>
             <a:endParaRPr kumimoji="1" lang="ja-JP" altLang="en-US"/>
           </a:p>
@@ -12191,8 +12191,8 @@
           </a:p>
         </p:txBody>
       </p:sp>
-      <mc:AlternateContent xmlns:mc="http://schemas.openxmlformats.org/markup-compatibility/2006">
-        <mc:Choice xmlns:a14="http://schemas.microsoft.com/office/drawing/2010/main" Requires="a14">
+      <mc:AlternateContent xmlns:mc="http://schemas.openxmlformats.org/markup-compatibility/2006" xmlns:a14="http://schemas.microsoft.com/office/drawing/2010/main">
+        <mc:Choice Requires="a14">
           <p:sp>
             <p:nvSpPr>
               <p:cNvPr id="29" name="テキスト ボックス 28">
@@ -12279,7 +12279,7 @@
             </p:txBody>
           </p:sp>
         </mc:Choice>
-        <mc:Fallback>
+        <mc:Fallback xmlns="">
           <p:sp>
             <p:nvSpPr>
               <p:cNvPr id="29" name="テキスト ボックス 28">
@@ -12324,8 +12324,8 @@
           </p:sp>
         </mc:Fallback>
       </mc:AlternateContent>
-      <mc:AlternateContent xmlns:mc="http://schemas.openxmlformats.org/markup-compatibility/2006">
-        <mc:Choice xmlns:a14="http://schemas.microsoft.com/office/drawing/2010/main" Requires="a14">
+      <mc:AlternateContent xmlns:mc="http://schemas.openxmlformats.org/markup-compatibility/2006" xmlns:a14="http://schemas.microsoft.com/office/drawing/2010/main">
+        <mc:Choice Requires="a14">
           <p:sp>
             <p:nvSpPr>
               <p:cNvPr id="30" name="テキスト ボックス 29">
@@ -12406,7 +12406,7 @@
             </p:txBody>
           </p:sp>
         </mc:Choice>
-        <mc:Fallback>
+        <mc:Fallback xmlns="">
           <p:sp>
             <p:nvSpPr>
               <p:cNvPr id="30" name="テキスト ボックス 29">
@@ -12451,8 +12451,8 @@
           </p:sp>
         </mc:Fallback>
       </mc:AlternateContent>
-      <mc:AlternateContent xmlns:mc="http://schemas.openxmlformats.org/markup-compatibility/2006">
-        <mc:Choice xmlns:a14="http://schemas.microsoft.com/office/drawing/2010/main" Requires="a14">
+      <mc:AlternateContent xmlns:mc="http://schemas.openxmlformats.org/markup-compatibility/2006" xmlns:a14="http://schemas.microsoft.com/office/drawing/2010/main">
+        <mc:Choice Requires="a14">
           <p:sp>
             <p:nvSpPr>
               <p:cNvPr id="31" name="テキスト ボックス 30">
@@ -12524,7 +12524,7 @@
             </p:txBody>
           </p:sp>
         </mc:Choice>
-        <mc:Fallback>
+        <mc:Fallback xmlns="">
           <p:sp>
             <p:nvSpPr>
               <p:cNvPr id="31" name="テキスト ボックス 30">
@@ -12569,8 +12569,8 @@
           </p:sp>
         </mc:Fallback>
       </mc:AlternateContent>
-      <mc:AlternateContent xmlns:mc="http://schemas.openxmlformats.org/markup-compatibility/2006">
-        <mc:Choice xmlns:a14="http://schemas.microsoft.com/office/drawing/2010/main" Requires="a14">
+      <mc:AlternateContent xmlns:mc="http://schemas.openxmlformats.org/markup-compatibility/2006" xmlns:a14="http://schemas.microsoft.com/office/drawing/2010/main">
+        <mc:Choice Requires="a14">
           <p:sp>
             <p:nvSpPr>
               <p:cNvPr id="32" name="テキスト ボックス 31">
@@ -12642,7 +12642,7 @@
             </p:txBody>
           </p:sp>
         </mc:Choice>
-        <mc:Fallback>
+        <mc:Fallback xmlns="">
           <p:sp>
             <p:nvSpPr>
               <p:cNvPr id="32" name="テキスト ボックス 31">
@@ -12847,8 +12847,8 @@
           </a:fontRef>
         </p:style>
       </p:cxnSp>
-      <mc:AlternateContent xmlns:mc="http://schemas.openxmlformats.org/markup-compatibility/2006">
-        <mc:Choice xmlns:a14="http://schemas.microsoft.com/office/drawing/2010/main" Requires="a14">
+      <mc:AlternateContent xmlns:mc="http://schemas.openxmlformats.org/markup-compatibility/2006" xmlns:a14="http://schemas.microsoft.com/office/drawing/2010/main">
+        <mc:Choice Requires="a14">
           <p:sp>
             <p:nvSpPr>
               <p:cNvPr id="43" name="テキスト ボックス 42">
@@ -12935,7 +12935,7 @@
             </p:txBody>
           </p:sp>
         </mc:Choice>
-        <mc:Fallback>
+        <mc:Fallback xmlns="">
           <p:sp>
             <p:nvSpPr>
               <p:cNvPr id="43" name="テキスト ボックス 42">
@@ -12980,8 +12980,8 @@
           </p:sp>
         </mc:Fallback>
       </mc:AlternateContent>
-      <mc:AlternateContent xmlns:mc="http://schemas.openxmlformats.org/markup-compatibility/2006">
-        <mc:Choice xmlns:a14="http://schemas.microsoft.com/office/drawing/2010/main" Requires="a14">
+      <mc:AlternateContent xmlns:mc="http://schemas.openxmlformats.org/markup-compatibility/2006" xmlns:a14="http://schemas.microsoft.com/office/drawing/2010/main">
+        <mc:Choice Requires="a14">
           <p:sp>
             <p:nvSpPr>
               <p:cNvPr id="44" name="テキスト ボックス 43">
@@ -13102,7 +13102,7 @@
             </p:txBody>
           </p:sp>
         </mc:Choice>
-        <mc:Fallback>
+        <mc:Fallback xmlns="">
           <p:sp>
             <p:nvSpPr>
               <p:cNvPr id="44" name="テキスト ボックス 43">
@@ -13147,8 +13147,8 @@
           </p:sp>
         </mc:Fallback>
       </mc:AlternateContent>
-      <mc:AlternateContent xmlns:mc="http://schemas.openxmlformats.org/markup-compatibility/2006">
-        <mc:Choice xmlns:a14="http://schemas.microsoft.com/office/drawing/2010/main" Requires="a14">
+      <mc:AlternateContent xmlns:mc="http://schemas.openxmlformats.org/markup-compatibility/2006" xmlns:a14="http://schemas.microsoft.com/office/drawing/2010/main">
+        <mc:Choice Requires="a14">
           <p:sp>
             <p:nvSpPr>
               <p:cNvPr id="56" name="テキスト ボックス 55">
@@ -13424,7 +13424,7 @@
             </p:txBody>
           </p:sp>
         </mc:Choice>
-        <mc:Fallback>
+        <mc:Fallback xmlns="">
           <p:sp>
             <p:nvSpPr>
               <p:cNvPr id="56" name="テキスト ボックス 55">
@@ -14845,8 +14845,8 @@
           </a:p>
         </p:txBody>
       </p:sp>
-      <mc:AlternateContent xmlns:mc="http://schemas.openxmlformats.org/markup-compatibility/2006">
-        <mc:Choice xmlns:a14="http://schemas.microsoft.com/office/drawing/2010/main" Requires="a14">
+      <mc:AlternateContent xmlns:mc="http://schemas.openxmlformats.org/markup-compatibility/2006" xmlns:a14="http://schemas.microsoft.com/office/drawing/2010/main">
+        <mc:Choice Requires="a14">
           <p:sp>
             <p:nvSpPr>
               <p:cNvPr id="14" name="テキスト ボックス 13">
@@ -14918,7 +14918,7 @@
             </p:txBody>
           </p:sp>
         </mc:Choice>
-        <mc:Fallback>
+        <mc:Fallback xmlns="">
           <p:sp>
             <p:nvSpPr>
               <p:cNvPr id="14" name="テキスト ボックス 13">
@@ -14963,8 +14963,8 @@
           </p:sp>
         </mc:Fallback>
       </mc:AlternateContent>
-      <mc:AlternateContent xmlns:mc="http://schemas.openxmlformats.org/markup-compatibility/2006">
-        <mc:Choice xmlns:a14="http://schemas.microsoft.com/office/drawing/2010/main" Requires="a14">
+      <mc:AlternateContent xmlns:mc="http://schemas.openxmlformats.org/markup-compatibility/2006" xmlns:a14="http://schemas.microsoft.com/office/drawing/2010/main">
+        <mc:Choice Requires="a14">
           <p:sp>
             <p:nvSpPr>
               <p:cNvPr id="15" name="テキスト ボックス 14">
@@ -15036,7 +15036,7 @@
             </p:txBody>
           </p:sp>
         </mc:Choice>
-        <mc:Fallback>
+        <mc:Fallback xmlns="">
           <p:sp>
             <p:nvSpPr>
               <p:cNvPr id="15" name="テキスト ボックス 14">
@@ -15081,8 +15081,8 @@
           </p:sp>
         </mc:Fallback>
       </mc:AlternateContent>
-      <mc:AlternateContent xmlns:mc="http://schemas.openxmlformats.org/markup-compatibility/2006">
-        <mc:Choice xmlns:a14="http://schemas.microsoft.com/office/drawing/2010/main" Requires="a14">
+      <mc:AlternateContent xmlns:mc="http://schemas.openxmlformats.org/markup-compatibility/2006" xmlns:a14="http://schemas.microsoft.com/office/drawing/2010/main">
+        <mc:Choice Requires="a14">
           <p:sp>
             <p:nvSpPr>
               <p:cNvPr id="26" name="テキスト ボックス 25">
@@ -15154,7 +15154,7 @@
             </p:txBody>
           </p:sp>
         </mc:Choice>
-        <mc:Fallback>
+        <mc:Fallback xmlns="">
           <p:sp>
             <p:nvSpPr>
               <p:cNvPr id="26" name="テキスト ボックス 25">
@@ -15281,8 +15281,8 @@
           </a:fontRef>
         </p:style>
       </p:cxnSp>
-      <mc:AlternateContent xmlns:mc="http://schemas.openxmlformats.org/markup-compatibility/2006">
-        <mc:Choice xmlns:a14="http://schemas.microsoft.com/office/drawing/2010/main" Requires="a14">
+      <mc:AlternateContent xmlns:mc="http://schemas.openxmlformats.org/markup-compatibility/2006" xmlns:a14="http://schemas.microsoft.com/office/drawing/2010/main">
+        <mc:Choice Requires="a14">
           <p:sp>
             <p:nvSpPr>
               <p:cNvPr id="34" name="テキスト ボックス 33">
@@ -15329,7 +15329,7 @@
             </p:txBody>
           </p:sp>
         </mc:Choice>
-        <mc:Fallback>
+        <mc:Fallback xmlns="">
           <p:sp>
             <p:nvSpPr>
               <p:cNvPr id="34" name="テキスト ボックス 33">
@@ -15374,8 +15374,8 @@
           </p:sp>
         </mc:Fallback>
       </mc:AlternateContent>
-      <mc:AlternateContent xmlns:mc="http://schemas.openxmlformats.org/markup-compatibility/2006">
-        <mc:Choice xmlns:a14="http://schemas.microsoft.com/office/drawing/2010/main" Requires="a14">
+      <mc:AlternateContent xmlns:mc="http://schemas.openxmlformats.org/markup-compatibility/2006" xmlns:a14="http://schemas.microsoft.com/office/drawing/2010/main">
+        <mc:Choice Requires="a14">
           <p:sp>
             <p:nvSpPr>
               <p:cNvPr id="40" name="テキスト ボックス 39">
@@ -15464,7 +15464,7 @@
             </p:txBody>
           </p:sp>
         </mc:Choice>
-        <mc:Fallback>
+        <mc:Fallback xmlns="">
           <p:sp>
             <p:nvSpPr>
               <p:cNvPr id="40" name="テキスト ボックス 39">
